--- a/slides/Rbootcamp-2026-day-1.pptx
+++ b/slides/Rbootcamp-2026-day-1.pptx
@@ -5146,7 +5146,42 @@
                 <a:ea typeface="Aptos Display" pitchFamily="34" charset="-122"/>
                 <a:cs typeface="Aptos Display" pitchFamily="34" charset="-120"/>
               </a:rPr>
-              <a:t>A brief data quality checklist</a:t>
+              <a:t>A brief </a:t>
+            </a:r>
+            <a:r>
+              <a:rPr lang="en-US" sz="2900" b="1" dirty="0" err="1">
+                <a:solidFill>
+                  <a:srgbClr val="00274C"/>
+                </a:solidFill>
+                <a:latin typeface="Aptos Display" pitchFamily="34" charset="0"/>
+                <a:ea typeface="Aptos Display" pitchFamily="34" charset="-122"/>
+                <a:cs typeface="Aptos Display" pitchFamily="34" charset="-120"/>
+              </a:rPr>
+              <a:t>data</a:t>
+            </a:r>
+            <a:r>
+              <a:rPr lang="en-US" sz="2900" b="1" dirty="0" err="1">
+                <a:solidFill>
+                  <a:schemeClr val="bg2">
+                    <a:lumMod val="50000"/>
+                  </a:schemeClr>
+                </a:solidFill>
+                <a:latin typeface="Aptos Display" pitchFamily="34" charset="0"/>
+                <a:ea typeface="Aptos Display" pitchFamily="34" charset="-122"/>
+                <a:cs typeface="Aptos Display" pitchFamily="34" charset="-120"/>
+              </a:rPr>
+              <a:t>.frame</a:t>
+            </a:r>
+            <a:r>
+              <a:rPr lang="en-US" sz="2900" b="1" dirty="0">
+                <a:solidFill>
+                  <a:srgbClr val="00274C"/>
+                </a:solidFill>
+                <a:latin typeface="Aptos Display" pitchFamily="34" charset="0"/>
+                <a:ea typeface="Aptos Display" pitchFamily="34" charset="-122"/>
+                <a:cs typeface="Aptos Display" pitchFamily="34" charset="-120"/>
+              </a:rPr>
+              <a:t> quality checklist</a:t>
             </a:r>
             <a:endParaRPr lang="en-US" sz="2900" dirty="0"/>
           </a:p>
@@ -13654,7 +13689,7 @@
                 <a:ea typeface="Aptos Display" pitchFamily="34" charset="-122"/>
                 <a:cs typeface="Aptos Display" pitchFamily="34" charset="-120"/>
               </a:rPr>
-              <a:t>Use the “health” data set through the workshop</a:t>
+              <a:t>Use the “health” data set throughout the workshop</a:t>
             </a:r>
             <a:endParaRPr lang="en-US" sz="2900" dirty="0"/>
           </a:p>
